--- a/context/areas/softserve/docs/2026-10-13_oracle-packs-strategy-deck/Oracle packs - packaging strategy.pptx
+++ b/context/areas/softserve/docs/2026-10-13_oracle-packs-strategy-deck/Oracle packs - packaging strategy.pptx
@@ -766,7 +766,27 @@
           <a:lstStyle/>
           <a:p>
             <a:r>
-              <a:t>Cases from the 'SoftServe OCI/AIDP expertise use cases' session.</a:t>
+              <a:t>Source: the 'SoftServe OCI/AIDP expertise use cases' session (13 Oct), 15 cases; this slide keeps the nine that are not database- or ERP-centric.</a:t>
+            </a:r>
+          </a:p>
+          <a:p>
+            <a:r>
+              <a:t>PURSUE. Digital twins: TerraPower nuclear siting from 18 months to as little as 8 weeks (client release); Global Switch data-centre twin (client release); Continental factory twin with a maintenance co-pilot, -10% maintenance expected. Live Oracle leads: BMW smart factory on Oracle Edge + Omniverse ($0.5M+), Orange Omniverse ($100K). Physics simulation: Krones from 4 h to 5 min, downtime -15%, Microsoft manufacturing award 2026 (runs on Azure); Shell reactor models up to 10^6x faster (joint papers). Lead: OMV (NVIDIA PhysicsNeMo), which Oracle rates low priority. GPU workload tuning: R&amp;D hardware-acceleration practice, run time halved, cloud cost about -50% (typical results claimed, no named client); fits Oracle's AI-cost laser campaign O3 (189+ accounts, priority); needs one named client; overlaps Option 2's AI running-cost reduction service.</a:t>
+            </a:r>
+          </a:p>
+          <a:p>
+            <a:r>
+              <a:t>PROOF ONLY. Robotics: Toyota Material Handling, model post-trained on 15 min of warehouse video, 99.5% precision and 92.8% recall vs 49.4% recall from simulation alone; AES solar robot on L40S, timeline -2-3 months. Industrial IoT: semiconductor-equipment maker, test data from ~10 systems, testing productivity +10-15%; Printing Planet compressor energy -10%, waste -50%+. Energy: Vital Energy ML for well pumps and gas lift, +45,000 barrels a month (~$4M in six months); a toy maker's carbon data model; Budderfly energy baselines. SoftServe's strongest vertical, not an Oracle priority (banking, aviation, government are).</a:t>
+            </a:r>
+          </a:p>
+          <a:p>
+            <a:r>
+              <a:t>PARK. Seismic: 3D seismic segmentation PoC for a US oil major; oil and gas ML platform; corrosion-detection PoCs for ABS and Pinnacle. Generative content: Avery label generation live on NVIDIA models; a retailer's image and video model trained from scratch (Google Cloud); no Oracle demand signal. Aerial vision: an insurer's 6-week PoC deriving 12 property attributes for 25,000+ locations; Cisco award for video-footage search (no client).</a:t>
+            </a:r>
+          </a:p>
+          <a:p>
+            <a:r>
+              <a:t>DATA- AND ERP-CENTRIC (AIDP, Option 2 territory): supply-chain and inventory agents on ERP data (pursue per deal; SoftServe's Inventory Management Teammate; closest public asset to Oracle's first AIDP target, EBS, 123 accounts), CFO finance and profitability analytics (pursue per deal with Oracle's Deep Insights; proof is reporting-level), migrations onto a lakehouse (pursue: Oracle campaigns on old warehouses, 150, and data movement, 222; Blis 5 PB moved in under 4 months, bill -20%), governed data foundation and semantic layer (pursue: Oracle's priority Lakehouse campaign, 225; BDUK, Shawbrook), banking risk and compliance data (pursue: banking is an Oracle priority industry; BNY's OCI landing zone is an internal credential), research and Q&amp;A over documents (pursue: Oracle's largest AIDP campaign, unstructured data, 238; McGill and Partners 6 h to 10 min).</a:t>
             </a:r>
           </a:p>
         </p:txBody>
@@ -11293,7 +11313,11 @@
           <a:bodyPr wrap="square" lIns="0" rIns="0" tIns="0" bIns="0" anchor="t"/>
           <a:lstStyle/>
           <a:p>
-            <a:pPr algn="l"/>
+            <a:pPr algn="l">
+              <a:lnSpc>
+                <a:spcPct val="100000"/>
+              </a:lnSpc>
+            </a:pPr>
             <a:r>
               <a:rPr sz="800" b="1">
                 <a:solidFill>
@@ -11433,7 +11457,13 @@
                 </a:solidFill>
                 <a:latin typeface="+mj-lt"/>
               </a:rPr>
-              <a:t>our expertise, beyond databases and ERP</a:t>
+              <a:t>our expertise beyond databases and ERP</a:t>
+            </a:r>
+            <a:r>
+              <a:rPr sz="2800" cap="none">
+                <a:latin typeface="+mj-lt"/>
+              </a:rPr>
+              <a:t>, mostly on OCI</a:t>
             </a:r>
           </a:p>
         </p:txBody>
@@ -11477,7 +11507,7 @@
         <p:spPr>
           <a:xfrm>
             <a:off x="408732" y="1660000"/>
-            <a:ext cx="2500000" cy="220000"/>
+            <a:ext cx="660000" cy="220000"/>
           </a:xfrm>
           <a:prstGeom prst="rect">
             <a:avLst/>
@@ -11496,7 +11526,7 @@
                 </a:solidFill>
                 <a:latin typeface="Roboto Mono"/>
               </a:rPr>
-              <a:t>CASE</a:t>
+              <a:t>CALL</a:t>
             </a:r>
           </a:p>
         </p:txBody>
@@ -11509,8 +11539,8 @@
         </p:nvSpPr>
         <p:spPr>
           <a:xfrm>
-            <a:off x="3008732" y="1660000"/>
-            <a:ext cx="3500000" cy="220000"/>
+            <a:off x="1168732" y="1660000"/>
+            <a:ext cx="2150000" cy="220000"/>
           </a:xfrm>
           <a:prstGeom prst="rect">
             <a:avLst/>
@@ -11529,7 +11559,7 @@
                 </a:solidFill>
                 <a:latin typeface="Roboto Mono"/>
               </a:rPr>
-              <a:t>PROBLEM</a:t>
+              <a:t>CASE</a:t>
             </a:r>
           </a:p>
         </p:txBody>
@@ -11542,8 +11572,8 @@
         </p:nvSpPr>
         <p:spPr>
           <a:xfrm>
-            <a:off x="6608732" y="1660000"/>
-            <a:ext cx="3440000" cy="220000"/>
+            <a:off x="3418732" y="1660000"/>
+            <a:ext cx="3250000" cy="220000"/>
           </a:xfrm>
           <a:prstGeom prst="rect">
             <a:avLst/>
@@ -11562,7 +11592,7 @@
                 </a:solidFill>
                 <a:latin typeface="Roboto Mono"/>
               </a:rPr>
-              <a:t>SOLUTION</a:t>
+              <a:t>PROBLEM</a:t>
             </a:r>
           </a:p>
         </p:txBody>
@@ -11575,8 +11605,41 @@
         </p:nvSpPr>
         <p:spPr>
           <a:xfrm>
-            <a:off x="10148732" y="1660000"/>
-            <a:ext cx="1653500" cy="220000"/>
+            <a:off x="6768732" y="1660000"/>
+            <a:ext cx="3250000" cy="220000"/>
+          </a:xfrm>
+          <a:prstGeom prst="rect">
+            <a:avLst/>
+          </a:prstGeom>
+          <a:noFill/>
+        </p:spPr>
+        <p:txBody>
+          <a:bodyPr wrap="square" lIns="0" rIns="0" tIns="0" bIns="0" anchor="b"/>
+          <a:lstStyle/>
+          <a:p>
+            <a:pPr algn="l"/>
+            <a:r>
+              <a:rPr sz="800" b="0">
+                <a:solidFill>
+                  <a:srgbClr val="808080"/>
+                </a:solidFill>
+                <a:latin typeface="Roboto Mono"/>
+              </a:rPr>
+              <a:t>SOLUTION</a:t>
+            </a:r>
+          </a:p>
+        </p:txBody>
+      </p:sp>
+      <p:sp>
+        <p:nvSpPr>
+          <p:cNvPr id="10" name="TextBox 9"/>
+          <p:cNvSpPr txBox="1"/>
+          <p:nvPr/>
+        </p:nvSpPr>
+        <p:spPr>
+          <a:xfrm>
+            <a:off x="10118732" y="1660000"/>
+            <a:ext cx="1683500" cy="220000"/>
           </a:xfrm>
           <a:prstGeom prst="rect">
             <a:avLst/>
@@ -11602,7 +11665,7 @@
       </p:sp>
       <p:cxnSp>
         <p:nvCxnSpPr>
-          <p:cNvPr id="10" name="Connector 9"/>
+          <p:cNvPr id="11" name="Connector 10"/>
           <p:cNvCxnSpPr/>
           <p:nvPr/>
         </p:nvCxnSpPr>
@@ -11637,26 +11700,318 @@
       </p:cxnSp>
       <p:sp>
         <p:nvSpPr>
-          <p:cNvPr id="11" name="Rectangle 10"/>
+          <p:cNvPr id="12" name="Rounded Rectangle 11"/>
           <p:cNvSpPr/>
           <p:nvPr/>
         </p:nvSpPr>
         <p:spPr>
           <a:xfrm>
-            <a:off x="358732" y="2040000"/>
-            <a:ext cx="11493500" cy="1500000"/>
-          </a:xfrm>
-          <a:prstGeom prst="rect">
-            <a:avLst/>
+            <a:off x="408732" y="1995000"/>
+            <a:ext cx="660000" cy="180000"/>
+          </a:xfrm>
+          <a:prstGeom prst="roundRect">
+            <a:avLst>
+              <a:gd name="adj" fmla="val 50000"/>
+            </a:avLst>
           </a:prstGeom>
           <a:solidFill>
-            <a:srgbClr val="F7F9FA"/>
+            <a:srgbClr val="26282B"/>
           </a:solidFill>
+          <a:ln>
+            <a:noFill/>
+          </a:ln>
+          <a:effectLst/>
+        </p:spPr>
+        <p:style>
+          <a:lnRef idx="1">
+            <a:schemeClr val="accent1"/>
+          </a:lnRef>
+          <a:fillRef idx="3">
+            <a:schemeClr val="accent1"/>
+          </a:fillRef>
+          <a:effectRef idx="2">
+            <a:schemeClr val="accent1"/>
+          </a:effectRef>
+          <a:fontRef idx="minor">
+            <a:schemeClr val="lt1"/>
+          </a:fontRef>
+        </p:style>
+        <p:txBody>
+          <a:bodyPr rtlCol="0" anchor="ctr" lIns="0" rIns="0" tIns="0" bIns="0"/>
+          <a:lstStyle/>
+          <a:p>
+            <a:pPr algn="ctr"/>
+            <a:r>
+              <a:rPr sz="650" b="1">
+                <a:solidFill>
+                  <a:srgbClr val="FFFFFF"/>
+                </a:solidFill>
+                <a:latin typeface="Roboto Mono"/>
+              </a:rPr>
+              <a:t>PURSUE</a:t>
+            </a:r>
+          </a:p>
+        </p:txBody>
+      </p:sp>
+      <p:sp>
+        <p:nvSpPr>
+          <p:cNvPr id="13" name="TextBox 12"/>
+          <p:cNvSpPr txBox="1"/>
+          <p:nvPr/>
+        </p:nvSpPr>
+        <p:spPr>
+          <a:xfrm>
+            <a:off x="1168732" y="1975000"/>
+            <a:ext cx="2150000" cy="374444"/>
+          </a:xfrm>
+          <a:prstGeom prst="rect">
+            <a:avLst/>
+          </a:prstGeom>
+          <a:noFill/>
+        </p:spPr>
+        <p:txBody>
+          <a:bodyPr wrap="square" lIns="0" rIns="0" tIns="0" bIns="0" anchor="t"/>
+          <a:lstStyle/>
+          <a:p>
+            <a:pPr algn="l">
+              <a:lnSpc>
+                <a:spcPct val="95000"/>
+              </a:lnSpc>
+            </a:pPr>
+            <a:r>
+              <a:rPr sz="1050" b="1">
+                <a:solidFill>
+                  <a:srgbClr val="26282B"/>
+                </a:solidFill>
+              </a:rPr>
+              <a:t>Digital twins for sites and factories</a:t>
+            </a:r>
+          </a:p>
+        </p:txBody>
+      </p:sp>
+      <p:sp>
+        <p:nvSpPr>
+          <p:cNvPr id="14" name="TextBox 13"/>
+          <p:cNvSpPr txBox="1"/>
+          <p:nvPr/>
+        </p:nvSpPr>
+        <p:spPr>
+          <a:xfrm>
+            <a:off x="3418732" y="1975000"/>
+            <a:ext cx="3250000" cy="374444"/>
+          </a:xfrm>
+          <a:prstGeom prst="rect">
+            <a:avLst/>
+          </a:prstGeom>
+          <a:noFill/>
+        </p:spPr>
+        <p:txBody>
+          <a:bodyPr wrap="square" lIns="0" rIns="0" tIns="0" bIns="0" anchor="t"/>
+          <a:lstStyle/>
+          <a:p>
+            <a:pPr algn="l">
+              <a:lnSpc>
+                <a:spcPct val="98000"/>
+              </a:lnSpc>
+            </a:pPr>
+            <a:r>
+              <a:rPr sz="1000" b="1">
+                <a:solidFill>
+                  <a:srgbClr val="26282B"/>
+                </a:solidFill>
+              </a:rPr>
+              <a:t>Planners </a:t>
+            </a:r>
+            <a:r>
+              <a:rPr sz="1000" b="0">
+                <a:solidFill>
+                  <a:srgbClr val="26282B"/>
+                </a:solidFill>
+              </a:rPr>
+              <a:t>redesign sites and factories on paper and on site; each change takes months.</a:t>
+            </a:r>
+          </a:p>
+        </p:txBody>
+      </p:sp>
+      <p:sp>
+        <p:nvSpPr>
+          <p:cNvPr id="15" name="TextBox 14"/>
+          <p:cNvSpPr txBox="1"/>
+          <p:nvPr/>
+        </p:nvSpPr>
+        <p:spPr>
+          <a:xfrm>
+            <a:off x="6768732" y="1975000"/>
+            <a:ext cx="3250000" cy="374444"/>
+          </a:xfrm>
+          <a:prstGeom prst="rect">
+            <a:avLst/>
+          </a:prstGeom>
+          <a:noFill/>
+        </p:spPr>
+        <p:txBody>
+          <a:bodyPr wrap="square" lIns="0" rIns="0" tIns="0" bIns="0" anchor="t"/>
+          <a:lstStyle/>
+          <a:p>
+            <a:pPr algn="l">
+              <a:lnSpc>
+                <a:spcPct val="98000"/>
+              </a:lnSpc>
+            </a:pPr>
+            <a:r>
+              <a:rPr sz="1000" b="0">
+                <a:solidFill>
+                  <a:srgbClr val="26282B"/>
+                </a:solidFill>
+              </a:rPr>
+              <a:t>A live 3D twin tests changes before building: siting from 18 months to 8 weeks.</a:t>
+            </a:r>
+          </a:p>
+        </p:txBody>
+      </p:sp>
+      <p:sp>
+        <p:nvSpPr>
+          <p:cNvPr id="16" name="Rounded Rectangle 15"/>
+          <p:cNvSpPr/>
+          <p:nvPr/>
+        </p:nvSpPr>
+        <p:spPr>
+          <a:xfrm>
+            <a:off x="10118732" y="1985000"/>
+            <a:ext cx="1440000" cy="200000"/>
+          </a:xfrm>
+          <a:prstGeom prst="roundRect">
+            <a:avLst>
+              <a:gd name="adj" fmla="val 50000"/>
+            </a:avLst>
+          </a:prstGeom>
+          <a:solidFill>
+            <a:srgbClr val="D2E7F6"/>
+          </a:solidFill>
+          <a:ln>
+            <a:noFill/>
+          </a:ln>
+          <a:effectLst/>
+        </p:spPr>
+        <p:style>
+          <a:lnRef idx="1">
+            <a:schemeClr val="accent1"/>
+          </a:lnRef>
+          <a:fillRef idx="3">
+            <a:schemeClr val="accent1"/>
+          </a:fillRef>
+          <a:effectRef idx="2">
+            <a:schemeClr val="accent1"/>
+          </a:effectRef>
+          <a:fontRef idx="minor">
+            <a:schemeClr val="lt1"/>
+          </a:fontRef>
+        </p:style>
+        <p:txBody>
+          <a:bodyPr rtlCol="0" anchor="ctr" lIns="0" rIns="0" tIns="0" bIns="0"/>
+          <a:lstStyle/>
+          <a:p>
+            <a:pPr algn="ctr"/>
+            <a:r>
+              <a:rPr sz="800" b="1">
+                <a:solidFill>
+                  <a:srgbClr val="1485C3"/>
+                </a:solidFill>
+              </a:rPr>
+              <a:t>OCI dedicated AI clusters</a:t>
+            </a:r>
+          </a:p>
+        </p:txBody>
+      </p:sp>
+      <p:sp>
+        <p:nvSpPr>
+          <p:cNvPr id="17" name="TextBox 16"/>
+          <p:cNvSpPr txBox="1"/>
+          <p:nvPr/>
+        </p:nvSpPr>
+        <p:spPr>
+          <a:xfrm>
+            <a:off x="10118732" y="2205000"/>
+            <a:ext cx="1683500" cy="164444"/>
+          </a:xfrm>
+          <a:prstGeom prst="rect">
+            <a:avLst/>
+          </a:prstGeom>
+          <a:noFill/>
+        </p:spPr>
+        <p:txBody>
+          <a:bodyPr wrap="square" lIns="0" rIns="0" tIns="0" bIns="0" anchor="t"/>
+          <a:lstStyle/>
+          <a:p>
+            <a:pPr algn="l"/>
+            <a:r>
+              <a:rPr sz="750" b="0">
+                <a:solidFill>
+                  <a:srgbClr val="595959"/>
+                </a:solidFill>
+              </a:rPr>
+              <a:t>NVIDIA Omniverse</a:t>
+            </a:r>
+          </a:p>
+        </p:txBody>
+      </p:sp>
+      <p:cxnSp>
+        <p:nvCxnSpPr>
+          <p:cNvPr id="18" name="Connector 17"/>
+          <p:cNvCxnSpPr/>
+          <p:nvPr/>
+        </p:nvCxnSpPr>
+        <p:spPr>
+          <a:xfrm>
+            <a:off x="358732" y="2374444"/>
+            <a:ext cx="11493500" cy="0"/>
+          </a:xfrm>
+          <a:prstGeom prst="line">
+            <a:avLst/>
+          </a:prstGeom>
           <a:ln w="9525">
             <a:solidFill>
               <a:srgbClr val="DCDCDC"/>
             </a:solidFill>
           </a:ln>
+        </p:spPr>
+        <p:style>
+          <a:lnRef idx="2">
+            <a:schemeClr val="accent1"/>
+          </a:lnRef>
+          <a:fillRef idx="0">
+            <a:schemeClr val="accent1"/>
+          </a:fillRef>
+          <a:effectRef idx="1">
+            <a:schemeClr val="accent1"/>
+          </a:effectRef>
+          <a:fontRef idx="minor">
+            <a:schemeClr val="tx1"/>
+          </a:fontRef>
+        </p:style>
+      </p:cxnSp>
+      <p:sp>
+        <p:nvSpPr>
+          <p:cNvPr id="19" name="Rounded Rectangle 18"/>
+          <p:cNvSpPr/>
+          <p:nvPr/>
+        </p:nvSpPr>
+        <p:spPr>
+          <a:xfrm>
+            <a:off x="408732" y="2449444"/>
+            <a:ext cx="660000" cy="180000"/>
+          </a:xfrm>
+          <a:prstGeom prst="roundRect">
+            <a:avLst>
+              <a:gd name="adj" fmla="val 50000"/>
+            </a:avLst>
+          </a:prstGeom>
+          <a:solidFill>
+            <a:srgbClr val="26282B"/>
+          </a:solidFill>
+          <a:ln>
+            <a:noFill/>
+          </a:ln>
           <a:effectLst/>
         </p:spPr>
         <p:style>
@@ -11674,62 +12029,2174 @@
           </a:fontRef>
         </p:style>
         <p:txBody>
-          <a:bodyPr rtlCol="0" anchor="ctr"/>
-          <a:lstStyle/>
-          <a:p/>
-        </p:txBody>
-      </p:sp>
-      <p:sp>
-        <p:nvSpPr>
-          <p:cNvPr id="12" name="TextBox 11"/>
+          <a:bodyPr rtlCol="0" anchor="ctr" lIns="0" rIns="0" tIns="0" bIns="0"/>
+          <a:lstStyle/>
+          <a:p>
+            <a:pPr algn="ctr"/>
+            <a:r>
+              <a:rPr sz="650" b="1">
+                <a:solidFill>
+                  <a:srgbClr val="FFFFFF"/>
+                </a:solidFill>
+                <a:latin typeface="Roboto Mono"/>
+              </a:rPr>
+              <a:t>PURSUE</a:t>
+            </a:r>
+          </a:p>
+        </p:txBody>
+      </p:sp>
+      <p:sp>
+        <p:nvSpPr>
+          <p:cNvPr id="20" name="TextBox 19"/>
           <p:cNvSpPr txBox="1"/>
           <p:nvPr/>
         </p:nvSpPr>
         <p:spPr>
           <a:xfrm>
-            <a:off x="358732" y="2040000"/>
-            <a:ext cx="11493500" cy="1500000"/>
-          </a:xfrm>
-          <a:prstGeom prst="rect">
-            <a:avLst/>
-          </a:prstGeom>
-          <a:noFill/>
-        </p:spPr>
-        <p:txBody>
-          <a:bodyPr wrap="square" lIns="0" rIns="0" tIns="0" bIns="0" anchor="ctr"/>
+            <a:off x="1168732" y="2429444"/>
+            <a:ext cx="2150000" cy="374444"/>
+          </a:xfrm>
+          <a:prstGeom prst="rect">
+            <a:avLst/>
+          </a:prstGeom>
+          <a:noFill/>
+        </p:spPr>
+        <p:txBody>
+          <a:bodyPr wrap="square" lIns="0" rIns="0" tIns="0" bIns="0" anchor="t"/>
+          <a:lstStyle/>
+          <a:p>
+            <a:pPr algn="l">
+              <a:lnSpc>
+                <a:spcPct val="95000"/>
+              </a:lnSpc>
+            </a:pPr>
+            <a:r>
+              <a:rPr sz="1050" b="1">
+                <a:solidFill>
+                  <a:srgbClr val="26282B"/>
+                </a:solidFill>
+              </a:rPr>
+              <a:t>Physics simulation models</a:t>
+            </a:r>
+          </a:p>
+        </p:txBody>
+      </p:sp>
+      <p:sp>
+        <p:nvSpPr>
+          <p:cNvPr id="21" name="TextBox 20"/>
+          <p:cNvSpPr txBox="1"/>
+          <p:nvPr/>
+        </p:nvSpPr>
+        <p:spPr>
+          <a:xfrm>
+            <a:off x="3418732" y="2429444"/>
+            <a:ext cx="3250000" cy="374444"/>
+          </a:xfrm>
+          <a:prstGeom prst="rect">
+            <a:avLst/>
+          </a:prstGeom>
+          <a:noFill/>
+        </p:spPr>
+        <p:txBody>
+          <a:bodyPr wrap="square" lIns="0" rIns="0" tIns="0" bIns="0" anchor="t"/>
+          <a:lstStyle/>
+          <a:p>
+            <a:pPr algn="l">
+              <a:lnSpc>
+                <a:spcPct val="98000"/>
+              </a:lnSpc>
+            </a:pPr>
+            <a:r>
+              <a:rPr sz="1000" b="1">
+                <a:solidFill>
+                  <a:srgbClr val="26282B"/>
+                </a:solidFill>
+              </a:rPr>
+              <a:t>Engineers </a:t>
+            </a:r>
+            <a:r>
+              <a:rPr sz="1000" b="0">
+                <a:solidFill>
+                  <a:srgbClr val="26282B"/>
+                </a:solidFill>
+              </a:rPr>
+              <a:t>wait hours per physics simulation, so every design change delays the product.</a:t>
+            </a:r>
+          </a:p>
+        </p:txBody>
+      </p:sp>
+      <p:sp>
+        <p:nvSpPr>
+          <p:cNvPr id="22" name="TextBox 21"/>
+          <p:cNvSpPr txBox="1"/>
+          <p:nvPr/>
+        </p:nvSpPr>
+        <p:spPr>
+          <a:xfrm>
+            <a:off x="6768732" y="2429444"/>
+            <a:ext cx="3250000" cy="374444"/>
+          </a:xfrm>
+          <a:prstGeom prst="rect">
+            <a:avLst/>
+          </a:prstGeom>
+          <a:noFill/>
+        </p:spPr>
+        <p:txBody>
+          <a:bodyPr wrap="square" lIns="0" rIns="0" tIns="0" bIns="0" anchor="t"/>
+          <a:lstStyle/>
+          <a:p>
+            <a:pPr algn="l">
+              <a:lnSpc>
+                <a:spcPct val="98000"/>
+              </a:lnSpc>
+            </a:pPr>
+            <a:r>
+              <a:rPr sz="1000" b="0">
+                <a:solidFill>
+                  <a:srgbClr val="26282B"/>
+                </a:solidFill>
+              </a:rPr>
+              <a:t>Physics-ML models on GPUs: simulation from 4 h to 5 min, downtime −15%.</a:t>
+            </a:r>
+          </a:p>
+        </p:txBody>
+      </p:sp>
+      <p:sp>
+        <p:nvSpPr>
+          <p:cNvPr id="23" name="Rounded Rectangle 22"/>
+          <p:cNvSpPr/>
+          <p:nvPr/>
+        </p:nvSpPr>
+        <p:spPr>
+          <a:xfrm>
+            <a:off x="10118732" y="2439444"/>
+            <a:ext cx="1440000" cy="200000"/>
+          </a:xfrm>
+          <a:prstGeom prst="roundRect">
+            <a:avLst>
+              <a:gd name="adj" fmla="val 50000"/>
+            </a:avLst>
+          </a:prstGeom>
+          <a:solidFill>
+            <a:srgbClr val="D2E7F6"/>
+          </a:solidFill>
+          <a:ln>
+            <a:noFill/>
+          </a:ln>
+          <a:effectLst/>
+        </p:spPr>
+        <p:style>
+          <a:lnRef idx="1">
+            <a:schemeClr val="accent1"/>
+          </a:lnRef>
+          <a:fillRef idx="3">
+            <a:schemeClr val="accent1"/>
+          </a:fillRef>
+          <a:effectRef idx="2">
+            <a:schemeClr val="accent1"/>
+          </a:effectRef>
+          <a:fontRef idx="minor">
+            <a:schemeClr val="lt1"/>
+          </a:fontRef>
+        </p:style>
+        <p:txBody>
+          <a:bodyPr rtlCol="0" anchor="ctr" lIns="0" rIns="0" tIns="0" bIns="0"/>
           <a:lstStyle/>
           <a:p>
             <a:pPr algn="ctr"/>
             <a:r>
-              <a:rPr sz="1400" b="1">
+              <a:rPr sz="800" b="1">
+                <a:solidFill>
+                  <a:srgbClr val="1485C3"/>
+                </a:solidFill>
+              </a:rPr>
+              <a:t>OCI dedicated AI clusters</a:t>
+            </a:r>
+          </a:p>
+        </p:txBody>
+      </p:sp>
+      <p:sp>
+        <p:nvSpPr>
+          <p:cNvPr id="24" name="TextBox 23"/>
+          <p:cNvSpPr txBox="1"/>
+          <p:nvPr/>
+        </p:nvSpPr>
+        <p:spPr>
+          <a:xfrm>
+            <a:off x="10118732" y="2659444"/>
+            <a:ext cx="1683500" cy="164444"/>
+          </a:xfrm>
+          <a:prstGeom prst="rect">
+            <a:avLst/>
+          </a:prstGeom>
+          <a:noFill/>
+        </p:spPr>
+        <p:txBody>
+          <a:bodyPr wrap="square" lIns="0" rIns="0" tIns="0" bIns="0" anchor="t"/>
+          <a:lstStyle/>
+          <a:p>
+            <a:pPr algn="l"/>
+            <a:r>
+              <a:rPr sz="750" b="0">
+                <a:solidFill>
+                  <a:srgbClr val="595959"/>
+                </a:solidFill>
+              </a:rPr>
+              <a:t>NVIDIA PhysicsNeMo</a:t>
+            </a:r>
+          </a:p>
+        </p:txBody>
+      </p:sp>
+      <p:cxnSp>
+        <p:nvCxnSpPr>
+          <p:cNvPr id="25" name="Connector 24"/>
+          <p:cNvCxnSpPr/>
+          <p:nvPr/>
+        </p:nvCxnSpPr>
+        <p:spPr>
+          <a:xfrm>
+            <a:off x="358732" y="2828888"/>
+            <a:ext cx="11493500" cy="0"/>
+          </a:xfrm>
+          <a:prstGeom prst="line">
+            <a:avLst/>
+          </a:prstGeom>
+          <a:ln w="9525">
+            <a:solidFill>
+              <a:srgbClr val="DCDCDC"/>
+            </a:solidFill>
+          </a:ln>
+        </p:spPr>
+        <p:style>
+          <a:lnRef idx="2">
+            <a:schemeClr val="accent1"/>
+          </a:lnRef>
+          <a:fillRef idx="0">
+            <a:schemeClr val="accent1"/>
+          </a:fillRef>
+          <a:effectRef idx="1">
+            <a:schemeClr val="accent1"/>
+          </a:effectRef>
+          <a:fontRef idx="minor">
+            <a:schemeClr val="tx1"/>
+          </a:fontRef>
+        </p:style>
+      </p:cxnSp>
+      <p:sp>
+        <p:nvSpPr>
+          <p:cNvPr id="26" name="Rounded Rectangle 25"/>
+          <p:cNvSpPr/>
+          <p:nvPr/>
+        </p:nvSpPr>
+        <p:spPr>
+          <a:xfrm>
+            <a:off x="408732" y="2903888"/>
+            <a:ext cx="660000" cy="180000"/>
+          </a:xfrm>
+          <a:prstGeom prst="roundRect">
+            <a:avLst>
+              <a:gd name="adj" fmla="val 50000"/>
+            </a:avLst>
+          </a:prstGeom>
+          <a:solidFill>
+            <a:srgbClr val="26282B"/>
+          </a:solidFill>
+          <a:ln>
+            <a:noFill/>
+          </a:ln>
+          <a:effectLst/>
+        </p:spPr>
+        <p:style>
+          <a:lnRef idx="1">
+            <a:schemeClr val="accent1"/>
+          </a:lnRef>
+          <a:fillRef idx="3">
+            <a:schemeClr val="accent1"/>
+          </a:fillRef>
+          <a:effectRef idx="2">
+            <a:schemeClr val="accent1"/>
+          </a:effectRef>
+          <a:fontRef idx="minor">
+            <a:schemeClr val="lt1"/>
+          </a:fontRef>
+        </p:style>
+        <p:txBody>
+          <a:bodyPr rtlCol="0" anchor="ctr" lIns="0" rIns="0" tIns="0" bIns="0"/>
+          <a:lstStyle/>
+          <a:p>
+            <a:pPr algn="ctr"/>
+            <a:r>
+              <a:rPr sz="650" b="1">
+                <a:solidFill>
+                  <a:srgbClr val="FFFFFF"/>
+                </a:solidFill>
+                <a:latin typeface="Roboto Mono"/>
+              </a:rPr>
+              <a:t>PURSUE</a:t>
+            </a:r>
+          </a:p>
+        </p:txBody>
+      </p:sp>
+      <p:sp>
+        <p:nvSpPr>
+          <p:cNvPr id="27" name="TextBox 26"/>
+          <p:cNvSpPr txBox="1"/>
+          <p:nvPr/>
+        </p:nvSpPr>
+        <p:spPr>
+          <a:xfrm>
+            <a:off x="1168732" y="2883888"/>
+            <a:ext cx="2150000" cy="374444"/>
+          </a:xfrm>
+          <a:prstGeom prst="rect">
+            <a:avLst/>
+          </a:prstGeom>
+          <a:noFill/>
+        </p:spPr>
+        <p:txBody>
+          <a:bodyPr wrap="square" lIns="0" rIns="0" tIns="0" bIns="0" anchor="t"/>
+          <a:lstStyle/>
+          <a:p>
+            <a:pPr algn="l">
+              <a:lnSpc>
+                <a:spcPct val="95000"/>
+              </a:lnSpc>
+            </a:pPr>
+            <a:r>
+              <a:rPr sz="1050" b="1">
                 <a:solidFill>
                   <a:srgbClr val="26282B"/>
                 </a:solidFill>
               </a:rPr>
-              <a:t>To be filled: </a:t>
-            </a:r>
-            <a:r>
-              <a:rPr sz="1400" b="0">
+              <a:t>GPU workload tuning</a:t>
+            </a:r>
+          </a:p>
+        </p:txBody>
+      </p:sp>
+      <p:sp>
+        <p:nvSpPr>
+          <p:cNvPr id="28" name="TextBox 27"/>
+          <p:cNvSpPr txBox="1"/>
+          <p:nvPr/>
+        </p:nvSpPr>
+        <p:spPr>
+          <a:xfrm>
+            <a:off x="3418732" y="2883888"/>
+            <a:ext cx="3250000" cy="374444"/>
+          </a:xfrm>
+          <a:prstGeom prst="rect">
+            <a:avLst/>
+          </a:prstGeom>
+          <a:noFill/>
+        </p:spPr>
+        <p:txBody>
+          <a:bodyPr wrap="square" lIns="0" rIns="0" tIns="0" bIns="0" anchor="t"/>
+          <a:lstStyle/>
+          <a:p>
+            <a:pPr algn="l">
+              <a:lnSpc>
+                <a:spcPct val="98000"/>
+              </a:lnSpc>
+            </a:pPr>
+            <a:r>
+              <a:rPr sz="1000" b="1">
                 <a:solidFill>
                   <a:srgbClr val="26282B"/>
                 </a:solidFill>
               </a:rPr>
-              <a:t>the cases from the “SoftServe OCI/AIDP expertise use cases” session</a:t>
-            </a:r>
-          </a:p>
-          <a:p>
-            <a:pPr algn="ctr">
-              <a:spcBef>
-                <a:spcPts val="600"/>
-              </a:spcBef>
+              <a:t>CTOs </a:t>
+            </a:r>
+            <a:r>
+              <a:rPr sz="1000" b="0">
+                <a:solidFill>
+                  <a:srgbClr val="26282B"/>
+                </a:solidFill>
+              </a:rPr>
+              <a:t>run AI and simulation jobs on untuned cloud GPUs; the bill keeps climbing.</a:t>
+            </a:r>
+          </a:p>
+        </p:txBody>
+      </p:sp>
+      <p:sp>
+        <p:nvSpPr>
+          <p:cNvPr id="29" name="TextBox 28"/>
+          <p:cNvSpPr txBox="1"/>
+          <p:nvPr/>
+        </p:nvSpPr>
+        <p:spPr>
+          <a:xfrm>
+            <a:off x="6768732" y="2883888"/>
+            <a:ext cx="3250000" cy="374444"/>
+          </a:xfrm>
+          <a:prstGeom prst="rect">
+            <a:avLst/>
+          </a:prstGeom>
+          <a:noFill/>
+        </p:spPr>
+        <p:txBody>
+          <a:bodyPr wrap="square" lIns="0" rIns="0" tIns="0" bIns="0" anchor="t"/>
+          <a:lstStyle/>
+          <a:p>
+            <a:pPr algn="l">
+              <a:lnSpc>
+                <a:spcPct val="98000"/>
+              </a:lnSpc>
             </a:pPr>
             <a:r>
-              <a:rPr sz="1100" b="0">
+              <a:rPr sz="1000" b="0">
+                <a:solidFill>
+                  <a:srgbClr val="26282B"/>
+                </a:solidFill>
+              </a:rPr>
+              <a:t>Workloads moved to dedicated clusters and tuned: run time halved, cost about −50%.</a:t>
+            </a:r>
+          </a:p>
+        </p:txBody>
+      </p:sp>
+      <p:sp>
+        <p:nvSpPr>
+          <p:cNvPr id="30" name="Rounded Rectangle 29"/>
+          <p:cNvSpPr/>
+          <p:nvPr/>
+        </p:nvSpPr>
+        <p:spPr>
+          <a:xfrm>
+            <a:off x="10118732" y="2893888"/>
+            <a:ext cx="1440000" cy="200000"/>
+          </a:xfrm>
+          <a:prstGeom prst="roundRect">
+            <a:avLst>
+              <a:gd name="adj" fmla="val 50000"/>
+            </a:avLst>
+          </a:prstGeom>
+          <a:solidFill>
+            <a:srgbClr val="D2E7F6"/>
+          </a:solidFill>
+          <a:ln>
+            <a:noFill/>
+          </a:ln>
+          <a:effectLst/>
+        </p:spPr>
+        <p:style>
+          <a:lnRef idx="1">
+            <a:schemeClr val="accent1"/>
+          </a:lnRef>
+          <a:fillRef idx="3">
+            <a:schemeClr val="accent1"/>
+          </a:fillRef>
+          <a:effectRef idx="2">
+            <a:schemeClr val="accent1"/>
+          </a:effectRef>
+          <a:fontRef idx="minor">
+            <a:schemeClr val="lt1"/>
+          </a:fontRef>
+        </p:style>
+        <p:txBody>
+          <a:bodyPr rtlCol="0" anchor="ctr" lIns="0" rIns="0" tIns="0" bIns="0"/>
+          <a:lstStyle/>
+          <a:p>
+            <a:pPr algn="ctr"/>
+            <a:r>
+              <a:rPr sz="800" b="1">
+                <a:solidFill>
+                  <a:srgbClr val="1485C3"/>
+                </a:solidFill>
+              </a:rPr>
+              <a:t>OCI dedicated AI clusters</a:t>
+            </a:r>
+          </a:p>
+        </p:txBody>
+      </p:sp>
+      <p:cxnSp>
+        <p:nvCxnSpPr>
+          <p:cNvPr id="31" name="Connector 30"/>
+          <p:cNvCxnSpPr/>
+          <p:nvPr/>
+        </p:nvCxnSpPr>
+        <p:spPr>
+          <a:xfrm>
+            <a:off x="358732" y="3283332"/>
+            <a:ext cx="11493500" cy="0"/>
+          </a:xfrm>
+          <a:prstGeom prst="line">
+            <a:avLst/>
+          </a:prstGeom>
+          <a:ln w="9525">
+            <a:solidFill>
+              <a:srgbClr val="DCDCDC"/>
+            </a:solidFill>
+          </a:ln>
+        </p:spPr>
+        <p:style>
+          <a:lnRef idx="2">
+            <a:schemeClr val="accent1"/>
+          </a:lnRef>
+          <a:fillRef idx="0">
+            <a:schemeClr val="accent1"/>
+          </a:fillRef>
+          <a:effectRef idx="1">
+            <a:schemeClr val="accent1"/>
+          </a:effectRef>
+          <a:fontRef idx="minor">
+            <a:schemeClr val="tx1"/>
+          </a:fontRef>
+        </p:style>
+      </p:cxnSp>
+      <p:sp>
+        <p:nvSpPr>
+          <p:cNvPr id="32" name="Rounded Rectangle 31"/>
+          <p:cNvSpPr/>
+          <p:nvPr/>
+        </p:nvSpPr>
+        <p:spPr>
+          <a:xfrm>
+            <a:off x="408732" y="3358332"/>
+            <a:ext cx="660000" cy="180000"/>
+          </a:xfrm>
+          <a:prstGeom prst="roundRect">
+            <a:avLst>
+              <a:gd name="adj" fmla="val 50000"/>
+            </a:avLst>
+          </a:prstGeom>
+          <a:noFill/>
+          <a:ln w="9525">
+            <a:solidFill>
+              <a:srgbClr val="26282B"/>
+            </a:solidFill>
+          </a:ln>
+          <a:effectLst/>
+        </p:spPr>
+        <p:style>
+          <a:lnRef idx="1">
+            <a:schemeClr val="accent1"/>
+          </a:lnRef>
+          <a:fillRef idx="3">
+            <a:schemeClr val="accent1"/>
+          </a:fillRef>
+          <a:effectRef idx="2">
+            <a:schemeClr val="accent1"/>
+          </a:effectRef>
+          <a:fontRef idx="minor">
+            <a:schemeClr val="lt1"/>
+          </a:fontRef>
+        </p:style>
+        <p:txBody>
+          <a:bodyPr rtlCol="0" anchor="ctr" lIns="0" rIns="0" tIns="0" bIns="0"/>
+          <a:lstStyle/>
+          <a:p>
+            <a:pPr algn="ctr"/>
+            <a:r>
+              <a:rPr sz="650" b="1">
+                <a:solidFill>
+                  <a:srgbClr val="26282B"/>
+                </a:solidFill>
+                <a:latin typeface="Roboto Mono"/>
+              </a:rPr>
+              <a:t>PROOF ONLY</a:t>
+            </a:r>
+          </a:p>
+        </p:txBody>
+      </p:sp>
+      <p:sp>
+        <p:nvSpPr>
+          <p:cNvPr id="33" name="TextBox 32"/>
+          <p:cNvSpPr txBox="1"/>
+          <p:nvPr/>
+        </p:nvSpPr>
+        <p:spPr>
+          <a:xfrm>
+            <a:off x="1168732" y="3338332"/>
+            <a:ext cx="2150000" cy="374444"/>
+          </a:xfrm>
+          <a:prstGeom prst="rect">
+            <a:avLst/>
+          </a:prstGeom>
+          <a:noFill/>
+        </p:spPr>
+        <p:txBody>
+          <a:bodyPr wrap="square" lIns="0" rIns="0" tIns="0" bIns="0" anchor="t"/>
+          <a:lstStyle/>
+          <a:p>
+            <a:pPr algn="l">
+              <a:lnSpc>
+                <a:spcPct val="95000"/>
+              </a:lnSpc>
+            </a:pPr>
+            <a:r>
+              <a:rPr sz="1050" b="1">
+                <a:solidFill>
+                  <a:srgbClr val="26282B"/>
+                </a:solidFill>
+              </a:rPr>
+              <a:t>Simulation-first robotics</a:t>
+            </a:r>
+          </a:p>
+        </p:txBody>
+      </p:sp>
+      <p:sp>
+        <p:nvSpPr>
+          <p:cNvPr id="34" name="TextBox 33"/>
+          <p:cNvSpPr txBox="1"/>
+          <p:nvPr/>
+        </p:nvSpPr>
+        <p:spPr>
+          <a:xfrm>
+            <a:off x="3418732" y="3338332"/>
+            <a:ext cx="3250000" cy="374444"/>
+          </a:xfrm>
+          <a:prstGeom prst="rect">
+            <a:avLst/>
+          </a:prstGeom>
+          <a:noFill/>
+        </p:spPr>
+        <p:txBody>
+          <a:bodyPr wrap="square" lIns="0" rIns="0" tIns="0" bIns="0" anchor="t"/>
+          <a:lstStyle/>
+          <a:p>
+            <a:pPr algn="l">
+              <a:lnSpc>
+                <a:spcPct val="98000"/>
+              </a:lnSpc>
+            </a:pPr>
+            <a:r>
+              <a:rPr sz="1000" b="1">
+                <a:solidFill>
+                  <a:srgbClr val="26282B"/>
+                </a:solidFill>
+              </a:rPr>
+              <a:t>Robotics teams </a:t>
+            </a:r>
+            <a:r>
+              <a:rPr sz="1000" b="0">
+                <a:solidFill>
+                  <a:srgbClr val="26282B"/>
+                </a:solidFill>
+              </a:rPr>
+              <a:t>lack real training footage, so each robot deployment waits months.</a:t>
+            </a:r>
+          </a:p>
+        </p:txBody>
+      </p:sp>
+      <p:sp>
+        <p:nvSpPr>
+          <p:cNvPr id="35" name="TextBox 34"/>
+          <p:cNvSpPr txBox="1"/>
+          <p:nvPr/>
+        </p:nvSpPr>
+        <p:spPr>
+          <a:xfrm>
+            <a:off x="6768732" y="3338332"/>
+            <a:ext cx="3250000" cy="374444"/>
+          </a:xfrm>
+          <a:prstGeom prst="rect">
+            <a:avLst/>
+          </a:prstGeom>
+          <a:noFill/>
+        </p:spPr>
+        <p:txBody>
+          <a:bodyPr wrap="square" lIns="0" rIns="0" tIns="0" bIns="0" anchor="t"/>
+          <a:lstStyle/>
+          <a:p>
+            <a:pPr algn="l">
+              <a:lnSpc>
+                <a:spcPct val="98000"/>
+              </a:lnSpc>
+            </a:pPr>
+            <a:r>
+              <a:rPr sz="1000" b="0">
+                <a:solidFill>
+                  <a:srgbClr val="26282B"/>
+                </a:solidFill>
+              </a:rPr>
+              <a:t>Trained in simulation, tuned on 15 min of real video: recall from 49% to 93%.</a:t>
+            </a:r>
+          </a:p>
+        </p:txBody>
+      </p:sp>
+      <p:sp>
+        <p:nvSpPr>
+          <p:cNvPr id="36" name="Rounded Rectangle 35"/>
+          <p:cNvSpPr/>
+          <p:nvPr/>
+        </p:nvSpPr>
+        <p:spPr>
+          <a:xfrm>
+            <a:off x="10118732" y="3348332"/>
+            <a:ext cx="1440000" cy="200000"/>
+          </a:xfrm>
+          <a:prstGeom prst="roundRect">
+            <a:avLst>
+              <a:gd name="adj" fmla="val 50000"/>
+            </a:avLst>
+          </a:prstGeom>
+          <a:solidFill>
+            <a:srgbClr val="D2E7F6"/>
+          </a:solidFill>
+          <a:ln>
+            <a:noFill/>
+          </a:ln>
+          <a:effectLst/>
+        </p:spPr>
+        <p:style>
+          <a:lnRef idx="1">
+            <a:schemeClr val="accent1"/>
+          </a:lnRef>
+          <a:fillRef idx="3">
+            <a:schemeClr val="accent1"/>
+          </a:fillRef>
+          <a:effectRef idx="2">
+            <a:schemeClr val="accent1"/>
+          </a:effectRef>
+          <a:fontRef idx="minor">
+            <a:schemeClr val="lt1"/>
+          </a:fontRef>
+        </p:style>
+        <p:txBody>
+          <a:bodyPr rtlCol="0" anchor="ctr" lIns="0" rIns="0" tIns="0" bIns="0"/>
+          <a:lstStyle/>
+          <a:p>
+            <a:pPr algn="ctr"/>
+            <a:r>
+              <a:rPr sz="800" b="1">
+                <a:solidFill>
+                  <a:srgbClr val="1485C3"/>
+                </a:solidFill>
+              </a:rPr>
+              <a:t>OCI dedicated AI clusters</a:t>
+            </a:r>
+          </a:p>
+        </p:txBody>
+      </p:sp>
+      <p:sp>
+        <p:nvSpPr>
+          <p:cNvPr id="37" name="TextBox 36"/>
+          <p:cNvSpPr txBox="1"/>
+          <p:nvPr/>
+        </p:nvSpPr>
+        <p:spPr>
+          <a:xfrm>
+            <a:off x="10118732" y="3568332"/>
+            <a:ext cx="1683500" cy="164444"/>
+          </a:xfrm>
+          <a:prstGeom prst="rect">
+            <a:avLst/>
+          </a:prstGeom>
+          <a:noFill/>
+        </p:spPr>
+        <p:txBody>
+          <a:bodyPr wrap="square" lIns="0" rIns="0" tIns="0" bIns="0" anchor="t"/>
+          <a:lstStyle/>
+          <a:p>
+            <a:pPr algn="l"/>
+            <a:r>
+              <a:rPr sz="750" b="0">
                 <a:solidFill>
                   <a:srgbClr val="595959"/>
                 </a:solidFill>
               </a:rPr>
-              <a:t>Each row: case name · problem (role, situation, cost) · solution (what changes, the measure) · runs on OCI dedicated AI clusters, AIDP or AIDP + AI Lakehouse</a:t>
+              <a:t>synthetic data</a:t>
+            </a:r>
+          </a:p>
+        </p:txBody>
+      </p:sp>
+      <p:cxnSp>
+        <p:nvCxnSpPr>
+          <p:cNvPr id="38" name="Connector 37"/>
+          <p:cNvCxnSpPr/>
+          <p:nvPr/>
+        </p:nvCxnSpPr>
+        <p:spPr>
+          <a:xfrm>
+            <a:off x="358732" y="3737776"/>
+            <a:ext cx="11493500" cy="0"/>
+          </a:xfrm>
+          <a:prstGeom prst="line">
+            <a:avLst/>
+          </a:prstGeom>
+          <a:ln w="9525">
+            <a:solidFill>
+              <a:srgbClr val="DCDCDC"/>
+            </a:solidFill>
+          </a:ln>
+        </p:spPr>
+        <p:style>
+          <a:lnRef idx="2">
+            <a:schemeClr val="accent1"/>
+          </a:lnRef>
+          <a:fillRef idx="0">
+            <a:schemeClr val="accent1"/>
+          </a:fillRef>
+          <a:effectRef idx="1">
+            <a:schemeClr val="accent1"/>
+          </a:effectRef>
+          <a:fontRef idx="minor">
+            <a:schemeClr val="tx1"/>
+          </a:fontRef>
+        </p:style>
+      </p:cxnSp>
+      <p:sp>
+        <p:nvSpPr>
+          <p:cNvPr id="39" name="Rounded Rectangle 38"/>
+          <p:cNvSpPr/>
+          <p:nvPr/>
+        </p:nvSpPr>
+        <p:spPr>
+          <a:xfrm>
+            <a:off x="408732" y="3812776"/>
+            <a:ext cx="660000" cy="180000"/>
+          </a:xfrm>
+          <a:prstGeom prst="roundRect">
+            <a:avLst>
+              <a:gd name="adj" fmla="val 50000"/>
+            </a:avLst>
+          </a:prstGeom>
+          <a:noFill/>
+          <a:ln w="9525">
+            <a:solidFill>
+              <a:srgbClr val="26282B"/>
+            </a:solidFill>
+          </a:ln>
+          <a:effectLst/>
+        </p:spPr>
+        <p:style>
+          <a:lnRef idx="1">
+            <a:schemeClr val="accent1"/>
+          </a:lnRef>
+          <a:fillRef idx="3">
+            <a:schemeClr val="accent1"/>
+          </a:fillRef>
+          <a:effectRef idx="2">
+            <a:schemeClr val="accent1"/>
+          </a:effectRef>
+          <a:fontRef idx="minor">
+            <a:schemeClr val="lt1"/>
+          </a:fontRef>
+        </p:style>
+        <p:txBody>
+          <a:bodyPr rtlCol="0" anchor="ctr" lIns="0" rIns="0" tIns="0" bIns="0"/>
+          <a:lstStyle/>
+          <a:p>
+            <a:pPr algn="ctr"/>
+            <a:r>
+              <a:rPr sz="650" b="1">
+                <a:solidFill>
+                  <a:srgbClr val="26282B"/>
+                </a:solidFill>
+                <a:latin typeface="Roboto Mono"/>
+              </a:rPr>
+              <a:t>PROOF ONLY</a:t>
+            </a:r>
+          </a:p>
+        </p:txBody>
+      </p:sp>
+      <p:sp>
+        <p:nvSpPr>
+          <p:cNvPr id="40" name="TextBox 39"/>
+          <p:cNvSpPr txBox="1"/>
+          <p:nvPr/>
+        </p:nvSpPr>
+        <p:spPr>
+          <a:xfrm>
+            <a:off x="1168732" y="3792776"/>
+            <a:ext cx="2150000" cy="374444"/>
+          </a:xfrm>
+          <a:prstGeom prst="rect">
+            <a:avLst/>
+          </a:prstGeom>
+          <a:noFill/>
+        </p:spPr>
+        <p:txBody>
+          <a:bodyPr wrap="square" lIns="0" rIns="0" tIns="0" bIns="0" anchor="t"/>
+          <a:lstStyle/>
+          <a:p>
+            <a:pPr algn="l">
+              <a:lnSpc>
+                <a:spcPct val="95000"/>
+              </a:lnSpc>
+            </a:pPr>
+            <a:r>
+              <a:rPr sz="1050" b="1">
+                <a:solidFill>
+                  <a:srgbClr val="26282B"/>
+                </a:solidFill>
+              </a:rPr>
+              <a:t>Industrial IoT and production analytics</a:t>
+            </a:r>
+          </a:p>
+        </p:txBody>
+      </p:sp>
+      <p:sp>
+        <p:nvSpPr>
+          <p:cNvPr id="41" name="TextBox 40"/>
+          <p:cNvSpPr txBox="1"/>
+          <p:nvPr/>
+        </p:nvSpPr>
+        <p:spPr>
+          <a:xfrm>
+            <a:off x="3418732" y="3792776"/>
+            <a:ext cx="3250000" cy="374444"/>
+          </a:xfrm>
+          <a:prstGeom prst="rect">
+            <a:avLst/>
+          </a:prstGeom>
+          <a:noFill/>
+        </p:spPr>
+        <p:txBody>
+          <a:bodyPr wrap="square" lIns="0" rIns="0" tIns="0" bIns="0" anchor="t"/>
+          <a:lstStyle/>
+          <a:p>
+            <a:pPr algn="l">
+              <a:lnSpc>
+                <a:spcPct val="98000"/>
+              </a:lnSpc>
+            </a:pPr>
+            <a:r>
+              <a:rPr sz="1000" b="1">
+                <a:solidFill>
+                  <a:srgbClr val="26282B"/>
+                </a:solidFill>
+              </a:rPr>
+              <a:t>Production engineers </a:t>
+            </a:r>
+            <a:r>
+              <a:rPr sz="1000" b="0">
+                <a:solidFill>
+                  <a:srgbClr val="26282B"/>
+                </a:solidFill>
+              </a:rPr>
+              <a:t>can't explain losses with machine and test data spread over ~10 systems.</a:t>
+            </a:r>
+          </a:p>
+        </p:txBody>
+      </p:sp>
+      <p:sp>
+        <p:nvSpPr>
+          <p:cNvPr id="42" name="TextBox 41"/>
+          <p:cNvSpPr txBox="1"/>
+          <p:nvPr/>
+        </p:nvSpPr>
+        <p:spPr>
+          <a:xfrm>
+            <a:off x="6768732" y="3792776"/>
+            <a:ext cx="3250000" cy="374444"/>
+          </a:xfrm>
+          <a:prstGeom prst="rect">
+            <a:avLst/>
+          </a:prstGeom>
+          <a:noFill/>
+        </p:spPr>
+        <p:txBody>
+          <a:bodyPr wrap="square" lIns="0" rIns="0" tIns="0" bIns="0" anchor="t"/>
+          <a:lstStyle/>
+          <a:p>
+            <a:pPr algn="l">
+              <a:lnSpc>
+                <a:spcPct val="98000"/>
+              </a:lnSpc>
+            </a:pPr>
+            <a:r>
+              <a:rPr sz="1000" b="0">
+                <a:solidFill>
+                  <a:srgbClr val="26282B"/>
+                </a:solidFill>
+              </a:rPr>
+              <a:t>One analytics layer over factory data: testing productivity +10–15%, energy −10%.</a:t>
+            </a:r>
+          </a:p>
+        </p:txBody>
+      </p:sp>
+      <p:sp>
+        <p:nvSpPr>
+          <p:cNvPr id="43" name="Rounded Rectangle 42"/>
+          <p:cNvSpPr/>
+          <p:nvPr/>
+        </p:nvSpPr>
+        <p:spPr>
+          <a:xfrm>
+            <a:off x="10118732" y="3802776"/>
+            <a:ext cx="373200" cy="200000"/>
+          </a:xfrm>
+          <a:prstGeom prst="roundRect">
+            <a:avLst>
+              <a:gd name="adj" fmla="val 50000"/>
+            </a:avLst>
+          </a:prstGeom>
+          <a:solidFill>
+            <a:srgbClr val="FDEDE8"/>
+          </a:solidFill>
+          <a:ln>
+            <a:noFill/>
+          </a:ln>
+          <a:effectLst/>
+        </p:spPr>
+        <p:style>
+          <a:lnRef idx="1">
+            <a:schemeClr val="accent1"/>
+          </a:lnRef>
+          <a:fillRef idx="3">
+            <a:schemeClr val="accent1"/>
+          </a:fillRef>
+          <a:effectRef idx="2">
+            <a:schemeClr val="accent1"/>
+          </a:effectRef>
+          <a:fontRef idx="minor">
+            <a:schemeClr val="lt1"/>
+          </a:fontRef>
+        </p:style>
+        <p:txBody>
+          <a:bodyPr rtlCol="0" anchor="ctr" lIns="0" rIns="0" tIns="0" bIns="0"/>
+          <a:lstStyle/>
+          <a:p>
+            <a:pPr algn="ctr"/>
+            <a:r>
+              <a:rPr sz="800" b="1">
+                <a:solidFill>
+                  <a:srgbClr val="26282B"/>
+                </a:solidFill>
+              </a:rPr>
+              <a:t>AIDP</a:t>
+            </a:r>
+          </a:p>
+        </p:txBody>
+      </p:sp>
+      <p:cxnSp>
+        <p:nvCxnSpPr>
+          <p:cNvPr id="44" name="Connector 43"/>
+          <p:cNvCxnSpPr/>
+          <p:nvPr/>
+        </p:nvCxnSpPr>
+        <p:spPr>
+          <a:xfrm>
+            <a:off x="358732" y="4192220"/>
+            <a:ext cx="11493500" cy="0"/>
+          </a:xfrm>
+          <a:prstGeom prst="line">
+            <a:avLst/>
+          </a:prstGeom>
+          <a:ln w="9525">
+            <a:solidFill>
+              <a:srgbClr val="DCDCDC"/>
+            </a:solidFill>
+          </a:ln>
+        </p:spPr>
+        <p:style>
+          <a:lnRef idx="2">
+            <a:schemeClr val="accent1"/>
+          </a:lnRef>
+          <a:fillRef idx="0">
+            <a:schemeClr val="accent1"/>
+          </a:fillRef>
+          <a:effectRef idx="1">
+            <a:schemeClr val="accent1"/>
+          </a:effectRef>
+          <a:fontRef idx="minor">
+            <a:schemeClr val="tx1"/>
+          </a:fontRef>
+        </p:style>
+      </p:cxnSp>
+      <p:sp>
+        <p:nvSpPr>
+          <p:cNvPr id="45" name="Rounded Rectangle 44"/>
+          <p:cNvSpPr/>
+          <p:nvPr/>
+        </p:nvSpPr>
+        <p:spPr>
+          <a:xfrm>
+            <a:off x="408732" y="4267220"/>
+            <a:ext cx="660000" cy="180000"/>
+          </a:xfrm>
+          <a:prstGeom prst="roundRect">
+            <a:avLst>
+              <a:gd name="adj" fmla="val 50000"/>
+            </a:avLst>
+          </a:prstGeom>
+          <a:noFill/>
+          <a:ln w="9525">
+            <a:solidFill>
+              <a:srgbClr val="26282B"/>
+            </a:solidFill>
+          </a:ln>
+          <a:effectLst/>
+        </p:spPr>
+        <p:style>
+          <a:lnRef idx="1">
+            <a:schemeClr val="accent1"/>
+          </a:lnRef>
+          <a:fillRef idx="3">
+            <a:schemeClr val="accent1"/>
+          </a:fillRef>
+          <a:effectRef idx="2">
+            <a:schemeClr val="accent1"/>
+          </a:effectRef>
+          <a:fontRef idx="minor">
+            <a:schemeClr val="lt1"/>
+          </a:fontRef>
+        </p:style>
+        <p:txBody>
+          <a:bodyPr rtlCol="0" anchor="ctr" lIns="0" rIns="0" tIns="0" bIns="0"/>
+          <a:lstStyle/>
+          <a:p>
+            <a:pPr algn="ctr"/>
+            <a:r>
+              <a:rPr sz="650" b="1">
+                <a:solidFill>
+                  <a:srgbClr val="26282B"/>
+                </a:solidFill>
+                <a:latin typeface="Roboto Mono"/>
+              </a:rPr>
+              <a:t>PROOF ONLY</a:t>
+            </a:r>
+          </a:p>
+        </p:txBody>
+      </p:sp>
+      <p:sp>
+        <p:nvSpPr>
+          <p:cNvPr id="46" name="TextBox 45"/>
+          <p:cNvSpPr txBox="1"/>
+          <p:nvPr/>
+        </p:nvSpPr>
+        <p:spPr>
+          <a:xfrm>
+            <a:off x="1168732" y="4247220"/>
+            <a:ext cx="2150000" cy="374444"/>
+          </a:xfrm>
+          <a:prstGeom prst="rect">
+            <a:avLst/>
+          </a:prstGeom>
+          <a:noFill/>
+        </p:spPr>
+        <p:txBody>
+          <a:bodyPr wrap="square" lIns="0" rIns="0" tIns="0" bIns="0" anchor="t"/>
+          <a:lstStyle/>
+          <a:p>
+            <a:pPr algn="l">
+              <a:lnSpc>
+                <a:spcPct val="95000"/>
+              </a:lnSpc>
+            </a:pPr>
+            <a:r>
+              <a:rPr sz="1050" b="1">
+                <a:solidFill>
+                  <a:srgbClr val="26282B"/>
+                </a:solidFill>
+              </a:rPr>
+              <a:t>Energy production and emissions</a:t>
+            </a:r>
+          </a:p>
+        </p:txBody>
+      </p:sp>
+      <p:sp>
+        <p:nvSpPr>
+          <p:cNvPr id="47" name="TextBox 46"/>
+          <p:cNvSpPr txBox="1"/>
+          <p:nvPr/>
+        </p:nvSpPr>
+        <p:spPr>
+          <a:xfrm>
+            <a:off x="3418732" y="4247220"/>
+            <a:ext cx="3250000" cy="374444"/>
+          </a:xfrm>
+          <a:prstGeom prst="rect">
+            <a:avLst/>
+          </a:prstGeom>
+          <a:noFill/>
+        </p:spPr>
+        <p:txBody>
+          <a:bodyPr wrap="square" lIns="0" rIns="0" tIns="0" bIns="0" anchor="t"/>
+          <a:lstStyle/>
+          <a:p>
+            <a:pPr algn="l">
+              <a:lnSpc>
+                <a:spcPct val="98000"/>
+              </a:lnSpc>
+            </a:pPr>
+            <a:r>
+              <a:rPr sz="1000" b="1">
+                <a:solidFill>
+                  <a:srgbClr val="26282B"/>
+                </a:solidFill>
+              </a:rPr>
+              <a:t>Oil and gas operators </a:t>
+            </a:r>
+            <a:r>
+              <a:rPr sz="1000" b="0">
+                <a:solidFill>
+                  <a:srgbClr val="26282B"/>
+                </a:solidFill>
+              </a:rPr>
+              <a:t>tune well pumps and gas lift by hand, so wells under-produce.</a:t>
+            </a:r>
+          </a:p>
+        </p:txBody>
+      </p:sp>
+      <p:sp>
+        <p:nvSpPr>
+          <p:cNvPr id="48" name="TextBox 47"/>
+          <p:cNvSpPr txBox="1"/>
+          <p:nvPr/>
+        </p:nvSpPr>
+        <p:spPr>
+          <a:xfrm>
+            <a:off x="6768732" y="4247220"/>
+            <a:ext cx="3250000" cy="374444"/>
+          </a:xfrm>
+          <a:prstGeom prst="rect">
+            <a:avLst/>
+          </a:prstGeom>
+          <a:noFill/>
+        </p:spPr>
+        <p:txBody>
+          <a:bodyPr wrap="square" lIns="0" rIns="0" tIns="0" bIns="0" anchor="t"/>
+          <a:lstStyle/>
+          <a:p>
+            <a:pPr algn="l">
+              <a:lnSpc>
+                <a:spcPct val="98000"/>
+              </a:lnSpc>
+            </a:pPr>
+            <a:r>
+              <a:rPr sz="1000" b="0">
+                <a:solidFill>
+                  <a:srgbClr val="26282B"/>
+                </a:solidFill>
+              </a:rPr>
+              <a:t>ML on production data tunes pumps and gas lift: +45,000 barrels a month.</a:t>
+            </a:r>
+          </a:p>
+        </p:txBody>
+      </p:sp>
+      <p:sp>
+        <p:nvSpPr>
+          <p:cNvPr id="49" name="Rounded Rectangle 48"/>
+          <p:cNvSpPr/>
+          <p:nvPr/>
+        </p:nvSpPr>
+        <p:spPr>
+          <a:xfrm>
+            <a:off x="10118732" y="4257220"/>
+            <a:ext cx="373200" cy="200000"/>
+          </a:xfrm>
+          <a:prstGeom prst="roundRect">
+            <a:avLst>
+              <a:gd name="adj" fmla="val 50000"/>
+            </a:avLst>
+          </a:prstGeom>
+          <a:solidFill>
+            <a:srgbClr val="FDEDE8"/>
+          </a:solidFill>
+          <a:ln>
+            <a:noFill/>
+          </a:ln>
+          <a:effectLst/>
+        </p:spPr>
+        <p:style>
+          <a:lnRef idx="1">
+            <a:schemeClr val="accent1"/>
+          </a:lnRef>
+          <a:fillRef idx="3">
+            <a:schemeClr val="accent1"/>
+          </a:fillRef>
+          <a:effectRef idx="2">
+            <a:schemeClr val="accent1"/>
+          </a:effectRef>
+          <a:fontRef idx="minor">
+            <a:schemeClr val="lt1"/>
+          </a:fontRef>
+        </p:style>
+        <p:txBody>
+          <a:bodyPr rtlCol="0" anchor="ctr" lIns="0" rIns="0" tIns="0" bIns="0"/>
+          <a:lstStyle/>
+          <a:p>
+            <a:pPr algn="ctr"/>
+            <a:r>
+              <a:rPr sz="800" b="1">
+                <a:solidFill>
+                  <a:srgbClr val="26282B"/>
+                </a:solidFill>
+              </a:rPr>
+              <a:t>AIDP</a:t>
+            </a:r>
+          </a:p>
+        </p:txBody>
+      </p:sp>
+      <p:cxnSp>
+        <p:nvCxnSpPr>
+          <p:cNvPr id="50" name="Connector 49"/>
+          <p:cNvCxnSpPr/>
+          <p:nvPr/>
+        </p:nvCxnSpPr>
+        <p:spPr>
+          <a:xfrm>
+            <a:off x="358732" y="4646664"/>
+            <a:ext cx="11493500" cy="0"/>
+          </a:xfrm>
+          <a:prstGeom prst="line">
+            <a:avLst/>
+          </a:prstGeom>
+          <a:ln w="9525">
+            <a:solidFill>
+              <a:srgbClr val="DCDCDC"/>
+            </a:solidFill>
+          </a:ln>
+        </p:spPr>
+        <p:style>
+          <a:lnRef idx="2">
+            <a:schemeClr val="accent1"/>
+          </a:lnRef>
+          <a:fillRef idx="0">
+            <a:schemeClr val="accent1"/>
+          </a:fillRef>
+          <a:effectRef idx="1">
+            <a:schemeClr val="accent1"/>
+          </a:effectRef>
+          <a:fontRef idx="minor">
+            <a:schemeClr val="tx1"/>
+          </a:fontRef>
+        </p:style>
+      </p:cxnSp>
+      <p:sp>
+        <p:nvSpPr>
+          <p:cNvPr id="51" name="Rounded Rectangle 50"/>
+          <p:cNvSpPr/>
+          <p:nvPr/>
+        </p:nvSpPr>
+        <p:spPr>
+          <a:xfrm>
+            <a:off x="408732" y="4721664"/>
+            <a:ext cx="660000" cy="180000"/>
+          </a:xfrm>
+          <a:prstGeom prst="roundRect">
+            <a:avLst>
+              <a:gd name="adj" fmla="val 50000"/>
+            </a:avLst>
+          </a:prstGeom>
+          <a:noFill/>
+          <a:ln w="9525">
+            <a:solidFill>
+              <a:srgbClr val="808080"/>
+            </a:solidFill>
+          </a:ln>
+          <a:effectLst/>
+        </p:spPr>
+        <p:style>
+          <a:lnRef idx="1">
+            <a:schemeClr val="accent1"/>
+          </a:lnRef>
+          <a:fillRef idx="3">
+            <a:schemeClr val="accent1"/>
+          </a:fillRef>
+          <a:effectRef idx="2">
+            <a:schemeClr val="accent1"/>
+          </a:effectRef>
+          <a:fontRef idx="minor">
+            <a:schemeClr val="lt1"/>
+          </a:fontRef>
+        </p:style>
+        <p:txBody>
+          <a:bodyPr rtlCol="0" anchor="ctr" lIns="0" rIns="0" tIns="0" bIns="0"/>
+          <a:lstStyle/>
+          <a:p>
+            <a:pPr algn="ctr"/>
+            <a:r>
+              <a:rPr sz="650" b="1">
+                <a:solidFill>
+                  <a:srgbClr val="595959"/>
+                </a:solidFill>
+                <a:latin typeface="Roboto Mono"/>
+              </a:rPr>
+              <a:t>PARK</a:t>
+            </a:r>
+          </a:p>
+        </p:txBody>
+      </p:sp>
+      <p:sp>
+        <p:nvSpPr>
+          <p:cNvPr id="52" name="TextBox 51"/>
+          <p:cNvSpPr txBox="1"/>
+          <p:nvPr/>
+        </p:nvSpPr>
+        <p:spPr>
+          <a:xfrm>
+            <a:off x="1168732" y="4701664"/>
+            <a:ext cx="2150000" cy="374444"/>
+          </a:xfrm>
+          <a:prstGeom prst="rect">
+            <a:avLst/>
+          </a:prstGeom>
+          <a:noFill/>
+        </p:spPr>
+        <p:txBody>
+          <a:bodyPr wrap="square" lIns="0" rIns="0" tIns="0" bIns="0" anchor="t"/>
+          <a:lstStyle/>
+          <a:p>
+            <a:pPr algn="l">
+              <a:lnSpc>
+                <a:spcPct val="95000"/>
+              </a:lnSpc>
+            </a:pPr>
+            <a:r>
+              <a:rPr sz="1050" b="1">
+                <a:solidFill>
+                  <a:srgbClr val="26282B"/>
+                </a:solidFill>
+              </a:rPr>
+              <a:t>Seismic and asset-image deep learning</a:t>
+            </a:r>
+          </a:p>
+        </p:txBody>
+      </p:sp>
+      <p:sp>
+        <p:nvSpPr>
+          <p:cNvPr id="53" name="TextBox 52"/>
+          <p:cNvSpPr txBox="1"/>
+          <p:nvPr/>
+        </p:nvSpPr>
+        <p:spPr>
+          <a:xfrm>
+            <a:off x="3418732" y="4701664"/>
+            <a:ext cx="3250000" cy="374444"/>
+          </a:xfrm>
+          <a:prstGeom prst="rect">
+            <a:avLst/>
+          </a:prstGeom>
+          <a:noFill/>
+        </p:spPr>
+        <p:txBody>
+          <a:bodyPr wrap="square" lIns="0" rIns="0" tIns="0" bIns="0" anchor="t"/>
+          <a:lstStyle/>
+          <a:p>
+            <a:pPr algn="l">
+              <a:lnSpc>
+                <a:spcPct val="98000"/>
+              </a:lnSpc>
+            </a:pPr>
+            <a:r>
+              <a:rPr sz="1000" b="1">
+                <a:solidFill>
+                  <a:srgbClr val="26282B"/>
+                </a:solidFill>
+              </a:rPr>
+              <a:t>Geoscientists and inspectors </a:t>
+            </a:r>
+            <a:r>
+              <a:rPr sz="1000" b="0">
+                <a:solidFill>
+                  <a:srgbClr val="26282B"/>
+                </a:solidFill>
+              </a:rPr>
+              <a:t>read seismic volumes and inspection images by hand; findings come late.</a:t>
+            </a:r>
+          </a:p>
+        </p:txBody>
+      </p:sp>
+      <p:sp>
+        <p:nvSpPr>
+          <p:cNvPr id="54" name="TextBox 53"/>
+          <p:cNvSpPr txBox="1"/>
+          <p:nvPr/>
+        </p:nvSpPr>
+        <p:spPr>
+          <a:xfrm>
+            <a:off x="6768732" y="4701664"/>
+            <a:ext cx="3250000" cy="374444"/>
+          </a:xfrm>
+          <a:prstGeom prst="rect">
+            <a:avLst/>
+          </a:prstGeom>
+          <a:noFill/>
+        </p:spPr>
+        <p:txBody>
+          <a:bodyPr wrap="square" lIns="0" rIns="0" tIns="0" bIns="0" anchor="t"/>
+          <a:lstStyle/>
+          <a:p>
+            <a:pPr algn="l">
+              <a:lnSpc>
+                <a:spcPct val="98000"/>
+              </a:lnSpc>
+            </a:pPr>
+            <a:r>
+              <a:rPr sz="1000" b="0">
+                <a:solidFill>
+                  <a:srgbClr val="26282B"/>
+                </a:solidFill>
+              </a:rPr>
+              <a:t>Deep learning segments 3D seismic data and flags corrosion in images (PoC level).</a:t>
+            </a:r>
+          </a:p>
+        </p:txBody>
+      </p:sp>
+      <p:sp>
+        <p:nvSpPr>
+          <p:cNvPr id="55" name="Rounded Rectangle 54"/>
+          <p:cNvSpPr/>
+          <p:nvPr/>
+        </p:nvSpPr>
+        <p:spPr>
+          <a:xfrm>
+            <a:off x="10118732" y="4711664"/>
+            <a:ext cx="1440000" cy="200000"/>
+          </a:xfrm>
+          <a:prstGeom prst="roundRect">
+            <a:avLst>
+              <a:gd name="adj" fmla="val 50000"/>
+            </a:avLst>
+          </a:prstGeom>
+          <a:solidFill>
+            <a:srgbClr val="D2E7F6"/>
+          </a:solidFill>
+          <a:ln>
+            <a:noFill/>
+          </a:ln>
+          <a:effectLst/>
+        </p:spPr>
+        <p:style>
+          <a:lnRef idx="1">
+            <a:schemeClr val="accent1"/>
+          </a:lnRef>
+          <a:fillRef idx="3">
+            <a:schemeClr val="accent1"/>
+          </a:fillRef>
+          <a:effectRef idx="2">
+            <a:schemeClr val="accent1"/>
+          </a:effectRef>
+          <a:fontRef idx="minor">
+            <a:schemeClr val="lt1"/>
+          </a:fontRef>
+        </p:style>
+        <p:txBody>
+          <a:bodyPr rtlCol="0" anchor="ctr" lIns="0" rIns="0" tIns="0" bIns="0"/>
+          <a:lstStyle/>
+          <a:p>
+            <a:pPr algn="ctr"/>
+            <a:r>
+              <a:rPr sz="800" b="1">
+                <a:solidFill>
+                  <a:srgbClr val="1485C3"/>
+                </a:solidFill>
+              </a:rPr>
+              <a:t>OCI dedicated AI clusters</a:t>
+            </a:r>
+          </a:p>
+        </p:txBody>
+      </p:sp>
+      <p:cxnSp>
+        <p:nvCxnSpPr>
+          <p:cNvPr id="56" name="Connector 55"/>
+          <p:cNvCxnSpPr/>
+          <p:nvPr/>
+        </p:nvCxnSpPr>
+        <p:spPr>
+          <a:xfrm>
+            <a:off x="358732" y="5101108"/>
+            <a:ext cx="11493500" cy="0"/>
+          </a:xfrm>
+          <a:prstGeom prst="line">
+            <a:avLst/>
+          </a:prstGeom>
+          <a:ln w="9525">
+            <a:solidFill>
+              <a:srgbClr val="DCDCDC"/>
+            </a:solidFill>
+          </a:ln>
+        </p:spPr>
+        <p:style>
+          <a:lnRef idx="2">
+            <a:schemeClr val="accent1"/>
+          </a:lnRef>
+          <a:fillRef idx="0">
+            <a:schemeClr val="accent1"/>
+          </a:fillRef>
+          <a:effectRef idx="1">
+            <a:schemeClr val="accent1"/>
+          </a:effectRef>
+          <a:fontRef idx="minor">
+            <a:schemeClr val="tx1"/>
+          </a:fontRef>
+        </p:style>
+      </p:cxnSp>
+      <p:sp>
+        <p:nvSpPr>
+          <p:cNvPr id="57" name="Rounded Rectangle 56"/>
+          <p:cNvSpPr/>
+          <p:nvPr/>
+        </p:nvSpPr>
+        <p:spPr>
+          <a:xfrm>
+            <a:off x="408732" y="5176108"/>
+            <a:ext cx="660000" cy="180000"/>
+          </a:xfrm>
+          <a:prstGeom prst="roundRect">
+            <a:avLst>
+              <a:gd name="adj" fmla="val 50000"/>
+            </a:avLst>
+          </a:prstGeom>
+          <a:noFill/>
+          <a:ln w="9525">
+            <a:solidFill>
+              <a:srgbClr val="808080"/>
+            </a:solidFill>
+          </a:ln>
+          <a:effectLst/>
+        </p:spPr>
+        <p:style>
+          <a:lnRef idx="1">
+            <a:schemeClr val="accent1"/>
+          </a:lnRef>
+          <a:fillRef idx="3">
+            <a:schemeClr val="accent1"/>
+          </a:fillRef>
+          <a:effectRef idx="2">
+            <a:schemeClr val="accent1"/>
+          </a:effectRef>
+          <a:fontRef idx="minor">
+            <a:schemeClr val="lt1"/>
+          </a:fontRef>
+        </p:style>
+        <p:txBody>
+          <a:bodyPr rtlCol="0" anchor="ctr" lIns="0" rIns="0" tIns="0" bIns="0"/>
+          <a:lstStyle/>
+          <a:p>
+            <a:pPr algn="ctr"/>
+            <a:r>
+              <a:rPr sz="650" b="1">
+                <a:solidFill>
+                  <a:srgbClr val="595959"/>
+                </a:solidFill>
+                <a:latin typeface="Roboto Mono"/>
+              </a:rPr>
+              <a:t>PARK</a:t>
+            </a:r>
+          </a:p>
+        </p:txBody>
+      </p:sp>
+      <p:sp>
+        <p:nvSpPr>
+          <p:cNvPr id="58" name="TextBox 57"/>
+          <p:cNvSpPr txBox="1"/>
+          <p:nvPr/>
+        </p:nvSpPr>
+        <p:spPr>
+          <a:xfrm>
+            <a:off x="1168732" y="5156108"/>
+            <a:ext cx="2150000" cy="374444"/>
+          </a:xfrm>
+          <a:prstGeom prst="rect">
+            <a:avLst/>
+          </a:prstGeom>
+          <a:noFill/>
+        </p:spPr>
+        <p:txBody>
+          <a:bodyPr wrap="square" lIns="0" rIns="0" tIns="0" bIns="0" anchor="t"/>
+          <a:lstStyle/>
+          <a:p>
+            <a:pPr algn="l">
+              <a:lnSpc>
+                <a:spcPct val="95000"/>
+              </a:lnSpc>
+            </a:pPr>
+            <a:r>
+              <a:rPr sz="1050" b="1">
+                <a:solidFill>
+                  <a:srgbClr val="26282B"/>
+                </a:solidFill>
+              </a:rPr>
+              <a:t>Generative content on brand data</a:t>
+            </a:r>
+          </a:p>
+        </p:txBody>
+      </p:sp>
+      <p:sp>
+        <p:nvSpPr>
+          <p:cNvPr id="59" name="TextBox 58"/>
+          <p:cNvSpPr txBox="1"/>
+          <p:nvPr/>
+        </p:nvSpPr>
+        <p:spPr>
+          <a:xfrm>
+            <a:off x="3418732" y="5156108"/>
+            <a:ext cx="3250000" cy="374444"/>
+          </a:xfrm>
+          <a:prstGeom prst="rect">
+            <a:avLst/>
+          </a:prstGeom>
+          <a:noFill/>
+        </p:spPr>
+        <p:txBody>
+          <a:bodyPr wrap="square" lIns="0" rIns="0" tIns="0" bIns="0" anchor="t"/>
+          <a:lstStyle/>
+          <a:p>
+            <a:pPr algn="l">
+              <a:lnSpc>
+                <a:spcPct val="98000"/>
+              </a:lnSpc>
+            </a:pPr>
+            <a:r>
+              <a:rPr sz="1000" b="1">
+                <a:solidFill>
+                  <a:srgbClr val="26282B"/>
+                </a:solidFill>
+              </a:rPr>
+              <a:t>Brand teams </a:t>
+            </a:r>
+            <a:r>
+              <a:rPr sz="1000" b="0">
+                <a:solidFill>
+                  <a:srgbClr val="26282B"/>
+                </a:solidFill>
+              </a:rPr>
+              <a:t>produce labels and visuals by hand, so campaigns wait on designers.</a:t>
+            </a:r>
+          </a:p>
+        </p:txBody>
+      </p:sp>
+      <p:sp>
+        <p:nvSpPr>
+          <p:cNvPr id="60" name="TextBox 59"/>
+          <p:cNvSpPr txBox="1"/>
+          <p:nvPr/>
+        </p:nvSpPr>
+        <p:spPr>
+          <a:xfrm>
+            <a:off x="6768732" y="5156108"/>
+            <a:ext cx="3250000" cy="374444"/>
+          </a:xfrm>
+          <a:prstGeom prst="rect">
+            <a:avLst/>
+          </a:prstGeom>
+          <a:noFill/>
+        </p:spPr>
+        <p:txBody>
+          <a:bodyPr wrap="square" lIns="0" rIns="0" tIns="0" bIns="0" anchor="t"/>
+          <a:lstStyle/>
+          <a:p>
+            <a:pPr algn="l">
+              <a:lnSpc>
+                <a:spcPct val="98000"/>
+              </a:lnSpc>
+            </a:pPr>
+            <a:r>
+              <a:rPr sz="1000" b="0">
+                <a:solidFill>
+                  <a:srgbClr val="26282B"/>
+                </a:solidFill>
+              </a:rPr>
+              <a:t>Models trained on brand assets generate labels and images at volume, live in production.</a:t>
+            </a:r>
+          </a:p>
+        </p:txBody>
+      </p:sp>
+      <p:sp>
+        <p:nvSpPr>
+          <p:cNvPr id="61" name="Rounded Rectangle 60"/>
+          <p:cNvSpPr/>
+          <p:nvPr/>
+        </p:nvSpPr>
+        <p:spPr>
+          <a:xfrm>
+            <a:off x="10118732" y="5166108"/>
+            <a:ext cx="1440000" cy="200000"/>
+          </a:xfrm>
+          <a:prstGeom prst="roundRect">
+            <a:avLst>
+              <a:gd name="adj" fmla="val 50000"/>
+            </a:avLst>
+          </a:prstGeom>
+          <a:solidFill>
+            <a:srgbClr val="D2E7F6"/>
+          </a:solidFill>
+          <a:ln>
+            <a:noFill/>
+          </a:ln>
+          <a:effectLst/>
+        </p:spPr>
+        <p:style>
+          <a:lnRef idx="1">
+            <a:schemeClr val="accent1"/>
+          </a:lnRef>
+          <a:fillRef idx="3">
+            <a:schemeClr val="accent1"/>
+          </a:fillRef>
+          <a:effectRef idx="2">
+            <a:schemeClr val="accent1"/>
+          </a:effectRef>
+          <a:fontRef idx="minor">
+            <a:schemeClr val="lt1"/>
+          </a:fontRef>
+        </p:style>
+        <p:txBody>
+          <a:bodyPr rtlCol="0" anchor="ctr" lIns="0" rIns="0" tIns="0" bIns="0"/>
+          <a:lstStyle/>
+          <a:p>
+            <a:pPr algn="ctr"/>
+            <a:r>
+              <a:rPr sz="800" b="1">
+                <a:solidFill>
+                  <a:srgbClr val="1485C3"/>
+                </a:solidFill>
+              </a:rPr>
+              <a:t>OCI dedicated AI clusters</a:t>
+            </a:r>
+          </a:p>
+        </p:txBody>
+      </p:sp>
+      <p:cxnSp>
+        <p:nvCxnSpPr>
+          <p:cNvPr id="62" name="Connector 61"/>
+          <p:cNvCxnSpPr/>
+          <p:nvPr/>
+        </p:nvCxnSpPr>
+        <p:spPr>
+          <a:xfrm>
+            <a:off x="358732" y="5555552"/>
+            <a:ext cx="11493500" cy="0"/>
+          </a:xfrm>
+          <a:prstGeom prst="line">
+            <a:avLst/>
+          </a:prstGeom>
+          <a:ln w="9525">
+            <a:solidFill>
+              <a:srgbClr val="DCDCDC"/>
+            </a:solidFill>
+          </a:ln>
+        </p:spPr>
+        <p:style>
+          <a:lnRef idx="2">
+            <a:schemeClr val="accent1"/>
+          </a:lnRef>
+          <a:fillRef idx="0">
+            <a:schemeClr val="accent1"/>
+          </a:fillRef>
+          <a:effectRef idx="1">
+            <a:schemeClr val="accent1"/>
+          </a:effectRef>
+          <a:fontRef idx="minor">
+            <a:schemeClr val="tx1"/>
+          </a:fontRef>
+        </p:style>
+      </p:cxnSp>
+      <p:sp>
+        <p:nvSpPr>
+          <p:cNvPr id="63" name="Rounded Rectangle 62"/>
+          <p:cNvSpPr/>
+          <p:nvPr/>
+        </p:nvSpPr>
+        <p:spPr>
+          <a:xfrm>
+            <a:off x="408732" y="5630552"/>
+            <a:ext cx="660000" cy="180000"/>
+          </a:xfrm>
+          <a:prstGeom prst="roundRect">
+            <a:avLst>
+              <a:gd name="adj" fmla="val 50000"/>
+            </a:avLst>
+          </a:prstGeom>
+          <a:noFill/>
+          <a:ln w="9525">
+            <a:solidFill>
+              <a:srgbClr val="808080"/>
+            </a:solidFill>
+          </a:ln>
+          <a:effectLst/>
+        </p:spPr>
+        <p:style>
+          <a:lnRef idx="1">
+            <a:schemeClr val="accent1"/>
+          </a:lnRef>
+          <a:fillRef idx="3">
+            <a:schemeClr val="accent1"/>
+          </a:fillRef>
+          <a:effectRef idx="2">
+            <a:schemeClr val="accent1"/>
+          </a:effectRef>
+          <a:fontRef idx="minor">
+            <a:schemeClr val="lt1"/>
+          </a:fontRef>
+        </p:style>
+        <p:txBody>
+          <a:bodyPr rtlCol="0" anchor="ctr" lIns="0" rIns="0" tIns="0" bIns="0"/>
+          <a:lstStyle/>
+          <a:p>
+            <a:pPr algn="ctr"/>
+            <a:r>
+              <a:rPr sz="650" b="1">
+                <a:solidFill>
+                  <a:srgbClr val="595959"/>
+                </a:solidFill>
+                <a:latin typeface="Roboto Mono"/>
+              </a:rPr>
+              <a:t>PARK</a:t>
+            </a:r>
+          </a:p>
+        </p:txBody>
+      </p:sp>
+      <p:sp>
+        <p:nvSpPr>
+          <p:cNvPr id="64" name="TextBox 63"/>
+          <p:cNvSpPr txBox="1"/>
+          <p:nvPr/>
+        </p:nvSpPr>
+        <p:spPr>
+          <a:xfrm>
+            <a:off x="1168732" y="5610552"/>
+            <a:ext cx="2150000" cy="374444"/>
+          </a:xfrm>
+          <a:prstGeom prst="rect">
+            <a:avLst/>
+          </a:prstGeom>
+          <a:noFill/>
+        </p:spPr>
+        <p:txBody>
+          <a:bodyPr wrap="square" lIns="0" rIns="0" tIns="0" bIns="0" anchor="t"/>
+          <a:lstStyle/>
+          <a:p>
+            <a:pPr algn="l">
+              <a:lnSpc>
+                <a:spcPct val="95000"/>
+              </a:lnSpc>
+            </a:pPr>
+            <a:r>
+              <a:rPr sz="1050" b="1">
+                <a:solidFill>
+                  <a:srgbClr val="26282B"/>
+                </a:solidFill>
+              </a:rPr>
+              <a:t>Vision on aerial imagery</a:t>
+            </a:r>
+          </a:p>
+        </p:txBody>
+      </p:sp>
+      <p:sp>
+        <p:nvSpPr>
+          <p:cNvPr id="65" name="TextBox 64"/>
+          <p:cNvSpPr txBox="1"/>
+          <p:nvPr/>
+        </p:nvSpPr>
+        <p:spPr>
+          <a:xfrm>
+            <a:off x="3418732" y="5610552"/>
+            <a:ext cx="3250000" cy="374444"/>
+          </a:xfrm>
+          <a:prstGeom prst="rect">
+            <a:avLst/>
+          </a:prstGeom>
+          <a:noFill/>
+        </p:spPr>
+        <p:txBody>
+          <a:bodyPr wrap="square" lIns="0" rIns="0" tIns="0" bIns="0" anchor="t"/>
+          <a:lstStyle/>
+          <a:p>
+            <a:pPr algn="l">
+              <a:lnSpc>
+                <a:spcPct val="98000"/>
+              </a:lnSpc>
+            </a:pPr>
+            <a:r>
+              <a:rPr sz="1000" b="1">
+                <a:solidFill>
+                  <a:srgbClr val="26282B"/>
+                </a:solidFill>
+              </a:rPr>
+              <a:t>Insurers </a:t>
+            </a:r>
+            <a:r>
+              <a:rPr sz="1000" b="0">
+                <a:solidFill>
+                  <a:srgbClr val="26282B"/>
+                </a:solidFill>
+              </a:rPr>
+              <a:t>inspect properties visit by visit, so underwriting data is thin and costly.</a:t>
+            </a:r>
+          </a:p>
+        </p:txBody>
+      </p:sp>
+      <p:sp>
+        <p:nvSpPr>
+          <p:cNvPr id="66" name="TextBox 65"/>
+          <p:cNvSpPr txBox="1"/>
+          <p:nvPr/>
+        </p:nvSpPr>
+        <p:spPr>
+          <a:xfrm>
+            <a:off x="6768732" y="5610552"/>
+            <a:ext cx="3250000" cy="374444"/>
+          </a:xfrm>
+          <a:prstGeom prst="rect">
+            <a:avLst/>
+          </a:prstGeom>
+          <a:noFill/>
+        </p:spPr>
+        <p:txBody>
+          <a:bodyPr wrap="square" lIns="0" rIns="0" tIns="0" bIns="0" anchor="t"/>
+          <a:lstStyle/>
+          <a:p>
+            <a:pPr algn="l">
+              <a:lnSpc>
+                <a:spcPct val="98000"/>
+              </a:lnSpc>
+            </a:pPr>
+            <a:r>
+              <a:rPr sz="1000" b="0">
+                <a:solidFill>
+                  <a:srgbClr val="26282B"/>
+                </a:solidFill>
+              </a:rPr>
+              <a:t>Vision models read 12 property attributes from aerial images for 25,000+ sites.</a:t>
+            </a:r>
+          </a:p>
+        </p:txBody>
+      </p:sp>
+      <p:sp>
+        <p:nvSpPr>
+          <p:cNvPr id="67" name="Rounded Rectangle 66"/>
+          <p:cNvSpPr/>
+          <p:nvPr/>
+        </p:nvSpPr>
+        <p:spPr>
+          <a:xfrm>
+            <a:off x="10118732" y="5620552"/>
+            <a:ext cx="1440000" cy="200000"/>
+          </a:xfrm>
+          <a:prstGeom prst="roundRect">
+            <a:avLst>
+              <a:gd name="adj" fmla="val 50000"/>
+            </a:avLst>
+          </a:prstGeom>
+          <a:solidFill>
+            <a:srgbClr val="D2E7F6"/>
+          </a:solidFill>
+          <a:ln>
+            <a:noFill/>
+          </a:ln>
+          <a:effectLst/>
+        </p:spPr>
+        <p:style>
+          <a:lnRef idx="1">
+            <a:schemeClr val="accent1"/>
+          </a:lnRef>
+          <a:fillRef idx="3">
+            <a:schemeClr val="accent1"/>
+          </a:fillRef>
+          <a:effectRef idx="2">
+            <a:schemeClr val="accent1"/>
+          </a:effectRef>
+          <a:fontRef idx="minor">
+            <a:schemeClr val="lt1"/>
+          </a:fontRef>
+        </p:style>
+        <p:txBody>
+          <a:bodyPr rtlCol="0" anchor="ctr" lIns="0" rIns="0" tIns="0" bIns="0"/>
+          <a:lstStyle/>
+          <a:p>
+            <a:pPr algn="ctr"/>
+            <a:r>
+              <a:rPr sz="800" b="1">
+                <a:solidFill>
+                  <a:srgbClr val="1485C3"/>
+                </a:solidFill>
+              </a:rPr>
+              <a:t>OCI dedicated AI clusters</a:t>
+            </a:r>
+          </a:p>
+        </p:txBody>
+      </p:sp>
+      <p:cxnSp>
+        <p:nvCxnSpPr>
+          <p:cNvPr id="68" name="Connector 67"/>
+          <p:cNvCxnSpPr/>
+          <p:nvPr/>
+        </p:nvCxnSpPr>
+        <p:spPr>
+          <a:xfrm>
+            <a:off x="358732" y="6009996"/>
+            <a:ext cx="11493500" cy="0"/>
+          </a:xfrm>
+          <a:prstGeom prst="line">
+            <a:avLst/>
+          </a:prstGeom>
+          <a:ln w="9525">
+            <a:solidFill>
+              <a:srgbClr val="DCDCDC"/>
+            </a:solidFill>
+          </a:ln>
+        </p:spPr>
+        <p:style>
+          <a:lnRef idx="2">
+            <a:schemeClr val="accent1"/>
+          </a:lnRef>
+          <a:fillRef idx="0">
+            <a:schemeClr val="accent1"/>
+          </a:fillRef>
+          <a:effectRef idx="1">
+            <a:schemeClr val="accent1"/>
+          </a:effectRef>
+          <a:fontRef idx="minor">
+            <a:schemeClr val="tx1"/>
+          </a:fontRef>
+        </p:style>
+      </p:cxnSp>
+      <p:sp>
+        <p:nvSpPr>
+          <p:cNvPr id="69" name="TextBox 68"/>
+          <p:cNvSpPr txBox="1"/>
+          <p:nvPr/>
+        </p:nvSpPr>
+        <p:spPr>
+          <a:xfrm>
+            <a:off x="358732" y="6070000"/>
+            <a:ext cx="11493500" cy="340000"/>
+          </a:xfrm>
+          <a:prstGeom prst="rect">
+            <a:avLst/>
+          </a:prstGeom>
+          <a:noFill/>
+        </p:spPr>
+        <p:txBody>
+          <a:bodyPr wrap="square" lIns="0" rIns="0" tIns="0" bIns="0" anchor="t"/>
+          <a:lstStyle/>
+          <a:p>
+            <a:pPr algn="l">
+              <a:lnSpc>
+                <a:spcPct val="100000"/>
+              </a:lnSpc>
+            </a:pPr>
+            <a:r>
+              <a:rPr sz="800" b="1">
+                <a:solidFill>
+                  <a:srgbClr val="595959"/>
+                </a:solidFill>
+              </a:rPr>
+              <a:t>Call (the expertise review's verdict on Oracle demand):</a:t>
+            </a:r>
+            <a:r>
+              <a:rPr sz="800" b="0">
+                <a:solidFill>
+                  <a:srgbClr val="595959"/>
+                </a:solidFill>
+              </a:rPr>
+              <a:t> Pursue = a live Oracle lead or priority campaign · Proof only = strong SoftServe proof, no Oracle lead · Park = thin proof or no demand signal.</a:t>
+            </a:r>
+          </a:p>
+          <a:p>
+            <a:pPr algn="l">
+              <a:lnSpc>
+                <a:spcPct val="100000"/>
+              </a:lnSpc>
+            </a:pPr>
+            <a:r>
+              <a:rPr sz="800" b="1">
+                <a:solidFill>
+                  <a:srgbClr val="595959"/>
+                </a:solidFill>
+              </a:rPr>
+              <a:t>Also found, data- and ERP-centric (Option 2 territory):</a:t>
+            </a:r>
+            <a:r>
+              <a:rPr sz="800" b="0">
+                <a:solidFill>
+                  <a:srgbClr val="595959"/>
+                </a:solidFill>
+              </a:rPr>
+              <a:t> supply-chain agents on ERP data · CFO finance analytics · warehouse migrations · a governed semantic layer · banking risk data · document Q&amp;A.</a:t>
             </a:r>
           </a:p>
         </p:txBody>

--- a/context/areas/softserve/docs/2026-10-13_oracle-packs-strategy-deck/Oracle packs - packaging strategy.pptx
+++ b/context/areas/softserve/docs/2026-10-13_oracle-packs-strategy-deck/Oracle packs - packaging strategy.pptx
@@ -11864,7 +11864,7 @@
                   <a:srgbClr val="26282B"/>
                 </a:solidFill>
               </a:rPr>
-              <a:t>A live 3D twin tests changes before building: siting from 18 months to 8 weeks.</a:t>
+              <a:t>A live 3D twin tests changes before building: siting from 18 months to 8 weeks.</a:t>
             </a:r>
           </a:p>
         </p:txBody>
@@ -12156,7 +12156,7 @@
                   <a:srgbClr val="26282B"/>
                 </a:solidFill>
               </a:rPr>
-              <a:t>Physics-ML models on GPUs: simulation from 4 h to 5 min, downtime −15%.</a:t>
+              <a:t>Physics-ML models on GPUs: simulation from 4 h to 5 min, downtime −15%.</a:t>
             </a:r>
           </a:p>
         </p:txBody>
@@ -12708,7 +12708,7 @@
                   <a:srgbClr val="26282B"/>
                 </a:solidFill>
               </a:rPr>
-              <a:t>Trained in simulation, tuned on 15 min of real video: recall from 49% to 93%.</a:t>
+              <a:t>Trained in simulation, tuned on 15 min of real video: recall from 49% to 93%.</a:t>
             </a:r>
           </a:p>
         </p:txBody>
@@ -12964,7 +12964,7 @@
                   <a:srgbClr val="26282B"/>
                 </a:solidFill>
               </a:rPr>
-              <a:t>can't explain losses with machine and test data spread over ~10 systems.</a:t>
+              <a:t>can't explain losses with machine and test data spread over ~10 systems.</a:t>
             </a:r>
           </a:p>
         </p:txBody>
@@ -13000,7 +13000,7 @@
                   <a:srgbClr val="26282B"/>
                 </a:solidFill>
               </a:rPr>
-              <a:t>One analytics layer over factory data: testing productivity +10–15%, energy −10%.</a:t>
+              <a:t>One analytics layer over factory data: energy −10%, testing productivity +10–15%.</a:t>
             </a:r>
           </a:p>
         </p:txBody>
@@ -13260,7 +13260,7 @@
                   <a:srgbClr val="26282B"/>
                 </a:solidFill>
               </a:rPr>
-              <a:t>ML on production data tunes pumps and gas lift: +45,000 barrels a month.</a:t>
+              <a:t>ML on production data tunes pumps and gas lift: +45,000 barrels a month.</a:t>
             </a:r>
           </a:p>
         </p:txBody>
@@ -14040,7 +14040,7 @@
                   <a:srgbClr val="26282B"/>
                 </a:solidFill>
               </a:rPr>
-              <a:t>Vision models read 12 property attributes from aerial images for 25,000+ sites.</a:t>
+              <a:t>Vision models read 12 property attributes from aerial images for 25,000+ sites.</a:t>
             </a:r>
           </a:p>
         </p:txBody>
